--- a/slides/Project_1_NCLDV_gene_package.pptx
+++ b/slides/Project_1_NCLDV_gene_package.pptx
@@ -10684,7 +10684,7 @@
                   <a:srgbClr val="555555"/>
                 </a:solidFill>
               </a:rPr>
-              <a:t>Anna Chesnokova · code: GitHub ncldv-gene-package</a:t>
+              <a:t>Anna Chesnokova · github.com/anisssum/MicrobialOmics_HW1</a:t>
             </a:r>
             <a:endParaRPr/>
           </a:p>
